--- a/tests/golden/visual/composition/v4_analytical_diagram/deck.pptx
+++ b/tests/golden/visual/composition/v4_analytical_diagram/deck.pptx
@@ -957,11 +957,11 @@
           <a:solidFill>
             <a:srgbClr val="FFFFFF"/>
           </a:solidFill>
-          <a:ln w="12700">
+          <a:ln w="19050">
             <a:solidFill>
-              <a:srgbClr val="8B4513"/>
+              <a:srgbClr val="C47B2B"/>
             </a:solidFill>
-            <a:prstDash val="solid"/>
+            <a:prstDash val="dash"/>
           </a:ln>
         </p:spPr>
       </p:sp>
@@ -998,7 +998,7 @@
                 <a:ea typeface="Microsoft YaHei" pitchFamily="34" charset="-122"/>
                 <a:cs typeface="Microsoft YaHei" pitchFamily="34" charset="-120"/>
               </a:rPr>
-              <a:t>图纸占位</a:t>
+              <a:t>技术图纸缺失</a:t>
             </a:r>
             <a:endParaRPr lang="en-US" sz="1200" dirty="0"/>
           </a:p>

--- a/tests/golden/visual/composition/v4_analytical_diagram/deck.pptx
+++ b/tests/golden/visual/composition/v4_analytical_diagram/deck.pptx
@@ -910,7 +910,7 @@
         <p:spPr>
           <a:xfrm>
             <a:off x="640080" y="411480"/>
-            <a:ext cx="7863840" cy="457200"/>
+            <a:ext cx="7863840" cy="601218"/>
           </a:xfrm>
           <a:prstGeom prst="rect">
             <a:avLst/>
@@ -948,8 +948,8 @@
         </p:nvSpPr>
         <p:spPr>
           <a:xfrm>
-            <a:off x="640080" y="944880"/>
-            <a:ext cx="4781093" cy="3211068"/>
+            <a:off x="640080" y="1088898"/>
+            <a:ext cx="4781093" cy="3067050"/>
           </a:xfrm>
           <a:prstGeom prst="rect">
             <a:avLst/>
@@ -973,7 +973,7 @@
         </p:nvSpPr>
         <p:spPr>
           <a:xfrm>
-            <a:off x="777240" y="2367534"/>
+            <a:off x="777240" y="2439543"/>
             <a:ext cx="4506773" cy="365760"/>
           </a:xfrm>
           <a:prstGeom prst="rect">
@@ -1012,8 +1012,8 @@
         </p:nvSpPr>
         <p:spPr>
           <a:xfrm>
-            <a:off x="5573573" y="944880"/>
-            <a:ext cx="2930347" cy="1191250"/>
+            <a:off x="5573573" y="1088898"/>
+            <a:ext cx="2930347" cy="1136523"/>
           </a:xfrm>
           <a:prstGeom prst="rect">
             <a:avLst/>
@@ -1119,8 +1119,8 @@
         </p:nvSpPr>
         <p:spPr>
           <a:xfrm>
-            <a:off x="5573573" y="2212330"/>
-            <a:ext cx="2930347" cy="622473"/>
+            <a:off x="5573573" y="2301621"/>
+            <a:ext cx="2930347" cy="592709"/>
           </a:xfrm>
           <a:prstGeom prst="rect">
             <a:avLst/>
@@ -1158,8 +1158,8 @@
         </p:nvSpPr>
         <p:spPr>
           <a:xfrm>
-            <a:off x="5573573" y="2872903"/>
-            <a:ext cx="2930347" cy="622473"/>
+            <a:off x="5573573" y="2932430"/>
+            <a:ext cx="2930347" cy="592709"/>
           </a:xfrm>
           <a:prstGeom prst="rect">
             <a:avLst/>
@@ -1197,8 +1197,8 @@
         </p:nvSpPr>
         <p:spPr>
           <a:xfrm>
-            <a:off x="5573573" y="3533475"/>
-            <a:ext cx="2930347" cy="622473"/>
+            <a:off x="5573573" y="3563239"/>
+            <a:ext cx="2930347" cy="592709"/>
           </a:xfrm>
           <a:prstGeom prst="rect">
             <a:avLst/>

--- a/tests/golden/visual/composition/v4_analytical_diagram/deck.pptx
+++ b/tests/golden/visual/composition/v4_analytical_diagram/deck.pptx
@@ -910,7 +910,7 @@
         <p:spPr>
           <a:xfrm>
             <a:off x="640080" y="411480"/>
-            <a:ext cx="7863840" cy="601218"/>
+            <a:ext cx="7863840" cy="621792"/>
           </a:xfrm>
           <a:prstGeom prst="rect">
             <a:avLst/>
@@ -948,8 +948,8 @@
         </p:nvSpPr>
         <p:spPr>
           <a:xfrm>
-            <a:off x="640080" y="1088898"/>
-            <a:ext cx="4781093" cy="3067050"/>
+            <a:off x="640080" y="1109472"/>
+            <a:ext cx="4781093" cy="3046476"/>
           </a:xfrm>
           <a:prstGeom prst="rect">
             <a:avLst/>
@@ -973,7 +973,7 @@
         </p:nvSpPr>
         <p:spPr>
           <a:xfrm>
-            <a:off x="777240" y="2439543"/>
+            <a:off x="777240" y="2449830"/>
             <a:ext cx="4506773" cy="365760"/>
           </a:xfrm>
           <a:prstGeom prst="rect">
@@ -1012,8 +1012,8 @@
         </p:nvSpPr>
         <p:spPr>
           <a:xfrm>
-            <a:off x="5573573" y="1088898"/>
-            <a:ext cx="2930347" cy="1136523"/>
+            <a:off x="5573573" y="1109472"/>
+            <a:ext cx="2930347" cy="1128705"/>
           </a:xfrm>
           <a:prstGeom prst="rect">
             <a:avLst/>
@@ -1119,8 +1119,8 @@
         </p:nvSpPr>
         <p:spPr>
           <a:xfrm>
-            <a:off x="5573573" y="2301621"/>
-            <a:ext cx="2930347" cy="592709"/>
+            <a:off x="5573573" y="2314377"/>
+            <a:ext cx="2930347" cy="588457"/>
           </a:xfrm>
           <a:prstGeom prst="rect">
             <a:avLst/>
@@ -1158,8 +1158,8 @@
         </p:nvSpPr>
         <p:spPr>
           <a:xfrm>
-            <a:off x="5573573" y="2932430"/>
-            <a:ext cx="2930347" cy="592709"/>
+            <a:off x="5573573" y="2940934"/>
+            <a:ext cx="2930347" cy="588457"/>
           </a:xfrm>
           <a:prstGeom prst="rect">
             <a:avLst/>
@@ -1197,8 +1197,8 @@
         </p:nvSpPr>
         <p:spPr>
           <a:xfrm>
-            <a:off x="5573573" y="3563239"/>
-            <a:ext cx="2930347" cy="592709"/>
+            <a:off x="5573573" y="3567491"/>
+            <a:ext cx="2930347" cy="588457"/>
           </a:xfrm>
           <a:prstGeom prst="rect">
             <a:avLst/>

--- a/tests/golden/visual/composition/v4_analytical_diagram/deck.pptx
+++ b/tests/golden/visual/composition/v4_analytical_diagram/deck.pptx
@@ -910,7 +910,7 @@
         <p:spPr>
           <a:xfrm>
             <a:off x="640080" y="411480"/>
-            <a:ext cx="7863840" cy="621792"/>
+            <a:ext cx="7863840" cy="601218"/>
           </a:xfrm>
           <a:prstGeom prst="rect">
             <a:avLst/>
@@ -948,8 +948,8 @@
         </p:nvSpPr>
         <p:spPr>
           <a:xfrm>
-            <a:off x="640080" y="1109472"/>
-            <a:ext cx="4781093" cy="3046476"/>
+            <a:off x="640080" y="1088898"/>
+            <a:ext cx="4781093" cy="3067050"/>
           </a:xfrm>
           <a:prstGeom prst="rect">
             <a:avLst/>
@@ -973,7 +973,7 @@
         </p:nvSpPr>
         <p:spPr>
           <a:xfrm>
-            <a:off x="777240" y="2449830"/>
+            <a:off x="777240" y="2439543"/>
             <a:ext cx="4506773" cy="365760"/>
           </a:xfrm>
           <a:prstGeom prst="rect">
@@ -1012,8 +1012,8 @@
         </p:nvSpPr>
         <p:spPr>
           <a:xfrm>
-            <a:off x="5573573" y="1109472"/>
-            <a:ext cx="2930347" cy="1128705"/>
+            <a:off x="5573573" y="1088898"/>
+            <a:ext cx="2930347" cy="1136523"/>
           </a:xfrm>
           <a:prstGeom prst="rect">
             <a:avLst/>
@@ -1119,8 +1119,8 @@
         </p:nvSpPr>
         <p:spPr>
           <a:xfrm>
-            <a:off x="5573573" y="2314377"/>
-            <a:ext cx="2930347" cy="588457"/>
+            <a:off x="5573573" y="2301621"/>
+            <a:ext cx="2930347" cy="592709"/>
           </a:xfrm>
           <a:prstGeom prst="rect">
             <a:avLst/>
@@ -1158,8 +1158,8 @@
         </p:nvSpPr>
         <p:spPr>
           <a:xfrm>
-            <a:off x="5573573" y="2940934"/>
-            <a:ext cx="2930347" cy="588457"/>
+            <a:off x="5573573" y="2932430"/>
+            <a:ext cx="2930347" cy="592709"/>
           </a:xfrm>
           <a:prstGeom prst="rect">
             <a:avLst/>
@@ -1197,8 +1197,8 @@
         </p:nvSpPr>
         <p:spPr>
           <a:xfrm>
-            <a:off x="5573573" y="3567491"/>
-            <a:ext cx="2930347" cy="588457"/>
+            <a:off x="5573573" y="3563239"/>
+            <a:ext cx="2930347" cy="592709"/>
           </a:xfrm>
           <a:prstGeom prst="rect">
             <a:avLst/>

--- a/tests/golden/visual/composition/v4_analytical_diagram/deck.pptx
+++ b/tests/golden/visual/composition/v4_analytical_diagram/deck.pptx
@@ -580,7 +580,7 @@
     <p:bg>
       <p:bgPr>
         <a:solidFill>
-          <a:srgbClr val="F7F6F3"/>
+          <a:srgbClr val="D9E2EA"/>
         </a:solidFill>
       </p:bgPr>
     </p:bg>
@@ -909,8 +909,8 @@
         </p:nvSpPr>
         <p:spPr>
           <a:xfrm>
-            <a:off x="640080" y="411480"/>
-            <a:ext cx="7863840" cy="601218"/>
+            <a:off x="502920" y="347472"/>
+            <a:ext cx="8138160" cy="594360"/>
           </a:xfrm>
           <a:prstGeom prst="rect">
             <a:avLst/>
@@ -926,9 +926,9 @@
               <a:buNone/>
             </a:pPr>
             <a:r>
-              <a:rPr lang="en-US" sz="3400" b="1" dirty="0">
+              <a:rPr lang="en-US" sz="2000" b="1" dirty="0">
                 <a:solidFill>
-                  <a:srgbClr val="1A1A1A"/>
+                  <a:srgbClr val="1B3A4B"/>
                 </a:solidFill>
                 <a:latin typeface="Microsoft YaHei" pitchFamily="34" charset="0"/>
                 <a:ea typeface="Microsoft YaHei" pitchFamily="34" charset="-122"/>
@@ -936,7 +936,7 @@
               </a:rPr>
               <a:t>急诊流线与交叉冲突分析</a:t>
             </a:r>
-            <a:endParaRPr lang="en-US" sz="3400" dirty="0"/>
+            <a:endParaRPr lang="en-US" sz="2000" dirty="0"/>
           </a:p>
         </p:txBody>
       </p:sp>
@@ -948,14 +948,14 @@
         </p:nvSpPr>
         <p:spPr>
           <a:xfrm>
-            <a:off x="640080" y="1088898"/>
-            <a:ext cx="4781093" cy="3067050"/>
+            <a:off x="502920" y="1018032"/>
+            <a:ext cx="4951171" cy="3201924"/>
           </a:xfrm>
           <a:prstGeom prst="rect">
             <a:avLst/>
           </a:prstGeom>
           <a:solidFill>
-            <a:srgbClr val="FFFFFF"/>
+            <a:srgbClr val="F3F7FA"/>
           </a:solidFill>
           <a:ln w="19050">
             <a:solidFill>
@@ -973,8 +973,8 @@
         </p:nvSpPr>
         <p:spPr>
           <a:xfrm>
-            <a:off x="777240" y="2439543"/>
-            <a:ext cx="4506773" cy="365760"/>
+            <a:off x="640080" y="2436114"/>
+            <a:ext cx="4676851" cy="365760"/>
           </a:xfrm>
           <a:prstGeom prst="rect">
             <a:avLst/>
@@ -992,7 +992,7 @@
             <a:r>
               <a:rPr lang="en-US" sz="1200" dirty="0">
                 <a:solidFill>
-                  <a:srgbClr val="777777"/>
+                  <a:srgbClr val="6A7D8C"/>
                 </a:solidFill>
                 <a:latin typeface="Microsoft YaHei" pitchFamily="34" charset="0"/>
                 <a:ea typeface="Microsoft YaHei" pitchFamily="34" charset="-122"/>
@@ -1012,8 +1012,8 @@
         </p:nvSpPr>
         <p:spPr>
           <a:xfrm>
-            <a:off x="5573573" y="1088898"/>
-            <a:ext cx="2930347" cy="1136523"/>
+            <a:off x="5606491" y="1018032"/>
+            <a:ext cx="3034589" cy="1187775"/>
           </a:xfrm>
           <a:prstGeom prst="rect">
             <a:avLst/>
@@ -1029,9 +1029,9 @@
               <a:buNone/>
             </a:pPr>
             <a:r>
-              <a:rPr lang="en-US" sz="1200" dirty="0">
+              <a:rPr lang="en-US" sz="1100" dirty="0">
                 <a:solidFill>
-                  <a:srgbClr val="777777"/>
+                  <a:srgbClr val="3A4F5F"/>
                 </a:solidFill>
                 <a:latin typeface="Microsoft YaHei" pitchFamily="34" charset="0"/>
                 <a:ea typeface="Microsoft YaHei" pitchFamily="34" charset="-122"/>
@@ -1039,16 +1039,16 @@
               </a:rPr>
               <a:t>图例</a:t>
             </a:r>
-            <a:endParaRPr lang="en-US" sz="1200" dirty="0"/>
+            <a:endParaRPr lang="en-US" sz="1100" dirty="0"/>
           </a:p>
           <a:p>
             <a:pPr algn="l" indent="0" marL="0">
               <a:buNone/>
             </a:pPr>
             <a:r>
-              <a:rPr lang="en-US" sz="1200" dirty="0">
+              <a:rPr lang="en-US" sz="1100" dirty="0">
                 <a:solidFill>
-                  <a:srgbClr val="777777"/>
+                  <a:srgbClr val="3A4F5F"/>
                 </a:solidFill>
                 <a:latin typeface="Microsoft YaHei" pitchFamily="34" charset="0"/>
                 <a:ea typeface="Microsoft YaHei" pitchFamily="34" charset="-122"/>
@@ -1056,16 +1056,16 @@
               </a:rPr>
               <a:t>· 急救流线</a:t>
             </a:r>
-            <a:endParaRPr lang="en-US" sz="1200" dirty="0"/>
+            <a:endParaRPr lang="en-US" sz="1100" dirty="0"/>
           </a:p>
           <a:p>
             <a:pPr algn="l" indent="0" marL="0">
               <a:buNone/>
             </a:pPr>
             <a:r>
-              <a:rPr lang="en-US" sz="1200" dirty="0">
+              <a:rPr lang="en-US" sz="1100" dirty="0">
                 <a:solidFill>
-                  <a:srgbClr val="777777"/>
+                  <a:srgbClr val="3A4F5F"/>
                 </a:solidFill>
                 <a:latin typeface="Microsoft YaHei" pitchFamily="34" charset="0"/>
                 <a:ea typeface="Microsoft YaHei" pitchFamily="34" charset="-122"/>
@@ -1073,16 +1073,16 @@
               </a:rPr>
               <a:t>· 步行流线</a:t>
             </a:r>
-            <a:endParaRPr lang="en-US" sz="1200" dirty="0"/>
+            <a:endParaRPr lang="en-US" sz="1100" dirty="0"/>
           </a:p>
           <a:p>
             <a:pPr algn="l" indent="0" marL="0">
               <a:buNone/>
             </a:pPr>
             <a:r>
-              <a:rPr lang="en-US" sz="1200" dirty="0">
+              <a:rPr lang="en-US" sz="1100" dirty="0">
                 <a:solidFill>
-                  <a:srgbClr val="777777"/>
+                  <a:srgbClr val="3A4F5F"/>
                 </a:solidFill>
                 <a:latin typeface="Microsoft YaHei" pitchFamily="34" charset="0"/>
                 <a:ea typeface="Microsoft YaHei" pitchFamily="34" charset="-122"/>
@@ -1090,16 +1090,16 @@
               </a:rPr>
               <a:t>· 后勤流线</a:t>
             </a:r>
-            <a:endParaRPr lang="en-US" sz="1200" dirty="0"/>
+            <a:endParaRPr lang="en-US" sz="1100" dirty="0"/>
           </a:p>
           <a:p>
             <a:pPr algn="l" indent="0" marL="0">
               <a:buNone/>
             </a:pPr>
             <a:r>
-              <a:rPr lang="en-US" sz="1200" dirty="0">
+              <a:rPr lang="en-US" sz="1100" dirty="0">
                 <a:solidFill>
-                  <a:srgbClr val="777777"/>
+                  <a:srgbClr val="3A4F5F"/>
                 </a:solidFill>
                 <a:latin typeface="Microsoft YaHei" pitchFamily="34" charset="0"/>
                 <a:ea typeface="Microsoft YaHei" pitchFamily="34" charset="-122"/>
@@ -1107,7 +1107,7 @@
               </a:rPr>
               <a:t>· 冲突节点</a:t>
             </a:r>
-            <a:endParaRPr lang="en-US" sz="1200" dirty="0"/>
+            <a:endParaRPr lang="en-US" sz="1100" dirty="0"/>
           </a:p>
         </p:txBody>
       </p:sp>
@@ -1119,8 +1119,8 @@
         </p:nvSpPr>
         <p:spPr>
           <a:xfrm>
-            <a:off x="5573573" y="2301621"/>
-            <a:ext cx="2930347" cy="592709"/>
+            <a:off x="5606491" y="2282007"/>
+            <a:ext cx="3034589" cy="620583"/>
           </a:xfrm>
           <a:prstGeom prst="rect">
             <a:avLst/>
@@ -1136,9 +1136,9 @@
               <a:buNone/>
             </a:pPr>
             <a:r>
-              <a:rPr lang="en-US" sz="1200" dirty="0">
+              <a:rPr lang="en-US" sz="1100" dirty="0">
                 <a:solidFill>
-                  <a:srgbClr val="777777"/>
+                  <a:srgbClr val="3A4F5F"/>
                 </a:solidFill>
                 <a:latin typeface="Microsoft YaHei" pitchFamily="34" charset="0"/>
                 <a:ea typeface="Microsoft YaHei" pitchFamily="34" charset="-122"/>
@@ -1146,7 +1146,7 @@
               </a:rPr>
               <a:t>结论 1：急救通道与步行入口交叉</a:t>
             </a:r>
-            <a:endParaRPr lang="en-US" sz="1200" dirty="0"/>
+            <a:endParaRPr lang="en-US" sz="1100" dirty="0"/>
           </a:p>
         </p:txBody>
       </p:sp>
@@ -1158,8 +1158,8 @@
         </p:nvSpPr>
         <p:spPr>
           <a:xfrm>
-            <a:off x="5573573" y="2932430"/>
-            <a:ext cx="2930347" cy="592709"/>
+            <a:off x="5606491" y="2940690"/>
+            <a:ext cx="3034589" cy="620583"/>
           </a:xfrm>
           <a:prstGeom prst="rect">
             <a:avLst/>
@@ -1175,9 +1175,9 @@
               <a:buNone/>
             </a:pPr>
             <a:r>
-              <a:rPr lang="en-US" sz="1200" dirty="0">
+              <a:rPr lang="en-US" sz="1100" dirty="0">
                 <a:solidFill>
-                  <a:srgbClr val="777777"/>
+                  <a:srgbClr val="3A4F5F"/>
                 </a:solidFill>
                 <a:latin typeface="Microsoft YaHei" pitchFamily="34" charset="0"/>
                 <a:ea typeface="Microsoft YaHei" pitchFamily="34" charset="-122"/>
@@ -1185,7 +1185,7 @@
               </a:rPr>
               <a:t>结论 2：候诊回流挤压抢救区</a:t>
             </a:r>
-            <a:endParaRPr lang="en-US" sz="1200" dirty="0"/>
+            <a:endParaRPr lang="en-US" sz="1100" dirty="0"/>
           </a:p>
         </p:txBody>
       </p:sp>
@@ -1197,8 +1197,8 @@
         </p:nvSpPr>
         <p:spPr>
           <a:xfrm>
-            <a:off x="5573573" y="3563239"/>
-            <a:ext cx="2930347" cy="592709"/>
+            <a:off x="5606491" y="3599373"/>
+            <a:ext cx="3034589" cy="620583"/>
           </a:xfrm>
           <a:prstGeom prst="rect">
             <a:avLst/>
@@ -1214,9 +1214,9 @@
               <a:buNone/>
             </a:pPr>
             <a:r>
-              <a:rPr lang="en-US" sz="1200" dirty="0">
+              <a:rPr lang="en-US" sz="1100" dirty="0">
                 <a:solidFill>
-                  <a:srgbClr val="777777"/>
+                  <a:srgbClr val="3A4F5F"/>
                 </a:solidFill>
                 <a:latin typeface="Microsoft YaHei" pitchFamily="34" charset="0"/>
                 <a:ea typeface="Microsoft YaHei" pitchFamily="34" charset="-122"/>
@@ -1224,7 +1224,7 @@
               </a:rPr>
               <a:t>结论 3：后勤与污物路径未闭环</a:t>
             </a:r>
-            <a:endParaRPr lang="en-US" sz="1200" dirty="0"/>
+            <a:endParaRPr lang="en-US" sz="1100" dirty="0"/>
           </a:p>
         </p:txBody>
       </p:sp>
@@ -1236,8 +1236,8 @@
         </p:nvSpPr>
         <p:spPr>
           <a:xfrm>
-            <a:off x="640080" y="4530852"/>
-            <a:ext cx="5504688" cy="201168"/>
+            <a:off x="502920" y="4594860"/>
+            <a:ext cx="5696712" cy="201168"/>
           </a:xfrm>
           <a:prstGeom prst="rect">
             <a:avLst/>
@@ -1255,7 +1255,7 @@
             <a:r>
               <a:rPr lang="en-US" sz="800" dirty="0">
                 <a:solidFill>
-                  <a:srgbClr val="777777"/>
+                  <a:srgbClr val="6A7D8C"/>
                 </a:solidFill>
                 <a:latin typeface="Microsoft YaHei" pitchFamily="34" charset="0"/>
                 <a:ea typeface="Microsoft YaHei" pitchFamily="34" charset="-122"/>
